--- a/slides/SICSS_LLM_Visualization_Session.pptx
+++ b/slides/SICSS_LLM_Visualization_Session.pptx
@@ -2246,7 +2246,7 @@
           <a:p>
             <a:fld id="{5BCAD085-E8A6-8845-BD4E-CB4CCA059FC4}" type="datetimeFigureOut">
               <a:rPr lang="en-US" smtClean="0"/>
-              <a:t>7/21/2026</a:t>
+              <a:t>7/22/2026</a:t>
             </a:fld>
             <a:endParaRPr lang="en-US"/>
           </a:p>
@@ -2414,7 +2414,7 @@
           <a:p>
             <a:fld id="{5BCAD085-E8A6-8845-BD4E-CB4CCA059FC4}" type="datetimeFigureOut">
               <a:rPr lang="en-US" smtClean="0"/>
-              <a:t>7/21/2026</a:t>
+              <a:t>7/22/2026</a:t>
             </a:fld>
             <a:endParaRPr lang="en-US"/>
           </a:p>
@@ -2592,7 +2592,7 @@
           <a:p>
             <a:fld id="{5BCAD085-E8A6-8845-BD4E-CB4CCA059FC4}" type="datetimeFigureOut">
               <a:rPr lang="en-US" smtClean="0"/>
-              <a:t>7/21/2026</a:t>
+              <a:t>7/22/2026</a:t>
             </a:fld>
             <a:endParaRPr lang="en-US"/>
           </a:p>
@@ -2760,7 +2760,7 @@
           <a:p>
             <a:fld id="{5BCAD085-E8A6-8845-BD4E-CB4CCA059FC4}" type="datetimeFigureOut">
               <a:rPr lang="en-US" smtClean="0"/>
-              <a:t>7/21/2026</a:t>
+              <a:t>7/22/2026</a:t>
             </a:fld>
             <a:endParaRPr lang="en-US"/>
           </a:p>
@@ -3005,7 +3005,7 @@
           <a:p>
             <a:fld id="{5BCAD085-E8A6-8845-BD4E-CB4CCA059FC4}" type="datetimeFigureOut">
               <a:rPr lang="en-US" smtClean="0"/>
-              <a:t>7/21/2026</a:t>
+              <a:t>7/22/2026</a:t>
             </a:fld>
             <a:endParaRPr lang="en-US"/>
           </a:p>
@@ -3290,7 +3290,7 @@
           <a:p>
             <a:fld id="{5BCAD085-E8A6-8845-BD4E-CB4CCA059FC4}" type="datetimeFigureOut">
               <a:rPr lang="en-US" smtClean="0"/>
-              <a:t>7/21/2026</a:t>
+              <a:t>7/22/2026</a:t>
             </a:fld>
             <a:endParaRPr lang="en-US"/>
           </a:p>
@@ -3709,7 +3709,7 @@
           <a:p>
             <a:fld id="{5BCAD085-E8A6-8845-BD4E-CB4CCA059FC4}" type="datetimeFigureOut">
               <a:rPr lang="en-US" smtClean="0"/>
-              <a:t>7/21/2026</a:t>
+              <a:t>7/22/2026</a:t>
             </a:fld>
             <a:endParaRPr lang="en-US"/>
           </a:p>
@@ -3826,7 +3826,7 @@
           <a:p>
             <a:fld id="{5BCAD085-E8A6-8845-BD4E-CB4CCA059FC4}" type="datetimeFigureOut">
               <a:rPr lang="en-US" smtClean="0"/>
-              <a:t>7/21/2026</a:t>
+              <a:t>7/22/2026</a:t>
             </a:fld>
             <a:endParaRPr lang="en-US"/>
           </a:p>
@@ -3921,7 +3921,7 @@
           <a:p>
             <a:fld id="{5BCAD085-E8A6-8845-BD4E-CB4CCA059FC4}" type="datetimeFigureOut">
               <a:rPr lang="en-US" smtClean="0"/>
-              <a:t>7/21/2026</a:t>
+              <a:t>7/22/2026</a:t>
             </a:fld>
             <a:endParaRPr lang="en-US"/>
           </a:p>
@@ -4196,7 +4196,7 @@
           <a:p>
             <a:fld id="{5BCAD085-E8A6-8845-BD4E-CB4CCA059FC4}" type="datetimeFigureOut">
               <a:rPr lang="en-US" smtClean="0"/>
-              <a:t>7/21/2026</a:t>
+              <a:t>7/22/2026</a:t>
             </a:fld>
             <a:endParaRPr lang="en-US"/>
           </a:p>
@@ -4448,7 +4448,7 @@
           <a:p>
             <a:fld id="{5BCAD085-E8A6-8845-BD4E-CB4CCA059FC4}" type="datetimeFigureOut">
               <a:rPr lang="en-US" smtClean="0"/>
-              <a:t>7/21/2026</a:t>
+              <a:t>7/22/2026</a:t>
             </a:fld>
             <a:endParaRPr lang="en-US"/>
           </a:p>
@@ -4659,7 +4659,7 @@
           <a:p>
             <a:fld id="{5BCAD085-E8A6-8845-BD4E-CB4CCA059FC4}" type="datetimeFigureOut">
               <a:rPr lang="en-US" smtClean="0"/>
-              <a:t>7/21/2026</a:t>
+              <a:t>7/22/2026</a:t>
             </a:fld>
             <a:endParaRPr lang="en-US"/>
           </a:p>
